--- a/media/resources/files/EkiOrunduuOnduktar_Boluu_1234_7kbhEgE.pptx
+++ b/media/resources/files/EkiOrunduuOnduktar_Boluu_1234_7kbhEgE.pptx
@@ -4265,7 +4265,7 @@
                 <a:ea typeface="+mn-ea"/>
                 <a:cs typeface="+mn-cs"/>
               </a:rPr>
-              <a:t>Турдуу пикирлер учун ыраазычылык билдиребиз.</a:t>
+              <a:t>Түрдүү пикирлер үчүн ыраазычылык билдиребиз.</a:t>
             </a:r>
           </a:p>
           <a:p>

--- a/media/resources/files/EkiOrunduuOnduktar_Boluu_1234_7kbhEgE.pptx
+++ b/media/resources/files/EkiOrunduuOnduktar_Boluu_1234_7kbhEgE.pptx
@@ -2443,7 +2443,7 @@
             <a:pPr algn="ctr"/>
             <a:r>
               <a:rPr lang="en-GB" sz="2000" dirty="0"/>
-              <a:t>7 ÷ 0.01</a:t>
+              <a:t>7 ÷ 0,01</a:t>
             </a:r>
           </a:p>
         </p:txBody>
@@ -2674,7 +2674,7 @@
             <a:pPr algn="ctr"/>
             <a:r>
               <a:rPr lang="en-GB" sz="2000" dirty="0"/>
-              <a:t>12 ÷ 0.04</a:t>
+              <a:t>12 ÷ 0,04</a:t>
             </a:r>
           </a:p>
         </p:txBody>
@@ -2749,7 +2749,7 @@
             <a:pPr algn="ctr"/>
             <a:r>
               <a:rPr lang="en-GB" sz="2000" dirty="0"/>
-              <a:t>4.9 ÷ 0.14</a:t>
+              <a:t>4,9 ÷ 0,14</a:t>
             </a:r>
           </a:p>
         </p:txBody>
@@ -2824,7 +2824,7 @@
             <a:pPr algn="ctr"/>
             <a:r>
               <a:rPr lang="en-GB" sz="2000" dirty="0"/>
-              <a:t>14.45 ÷ 0.34</a:t>
+              <a:t>14,45 ÷ 0,34</a:t>
             </a:r>
           </a:p>
         </p:txBody>
@@ -3023,7 +3023,7 @@
             <a:pPr algn="ctr"/>
             <a:r>
               <a:rPr lang="en-GB" sz="2000" dirty="0"/>
-              <a:t>7 ÷ 0.01</a:t>
+              <a:t>7 ÷ 0,01</a:t>
             </a:r>
           </a:p>
         </p:txBody>
@@ -3299,7 +3299,7 @@
             <a:pPr algn="ctr"/>
             <a:r>
               <a:rPr lang="en-GB" sz="2000" dirty="0"/>
-              <a:t>12 ÷ 0.04</a:t>
+              <a:t>12 ÷ 0,04</a:t>
             </a:r>
           </a:p>
         </p:txBody>
@@ -3419,7 +3419,7 @@
             <a:pPr algn="ctr"/>
             <a:r>
               <a:rPr lang="en-GB" sz="2000" dirty="0"/>
-              <a:t>4.9 ÷ 0.14</a:t>
+              <a:t>4,9 ÷ 0,14</a:t>
             </a:r>
           </a:p>
         </p:txBody>
@@ -3539,7 +3539,7 @@
             <a:pPr algn="ctr"/>
             <a:r>
               <a:rPr lang="en-GB" sz="2000" dirty="0"/>
-              <a:t>14.45 ÷ 0.34</a:t>
+              <a:t>14,45 ÷ 0,34</a:t>
             </a:r>
           </a:p>
         </p:txBody>
@@ -3623,7 +3623,7 @@
             <a:pPr algn="just"/>
             <a:r>
               <a:rPr lang="en-GB" sz="2000" dirty="0"/>
-              <a:t>42.5</a:t>
+              <a:t>42,5</a:t>
             </a:r>
           </a:p>
         </p:txBody>
